--- a/common/CPSC357_Lectures.pptx
+++ b/common/CPSC357_Lectures.pptx
@@ -7,9 +7,10 @@
   <p:sldIdLst>
     <p:sldId id="256" r:id="rId2"/>
     <p:sldId id="257" r:id="rId3"/>
-    <p:sldId id="258" r:id="rId4"/>
-    <p:sldId id="259" r:id="rId5"/>
-    <p:sldId id="260" r:id="rId6"/>
+    <p:sldId id="259" r:id="rId4"/>
+    <p:sldId id="260" r:id="rId5"/>
+    <p:sldId id="261" r:id="rId6"/>
+    <p:sldId id="262" r:id="rId7"/>
   </p:sldIdLst>
   <p:sldSz cx="12192000" cy="6858000"/>
   <p:notesSz cx="6858000" cy="9144000"/>
@@ -3376,14 +3377,27 @@
             <p:ph type="subTitle" idx="1"/>
           </p:nvPr>
         </p:nvSpPr>
-        <p:spPr/>
-        <p:txBody>
-          <a:bodyPr/>
+        <p:spPr>
+          <a:xfrm>
+            <a:off x="1524000" y="4399480"/>
+            <a:ext cx="9144000" cy="1655762"/>
+          </a:xfrm>
+        </p:spPr>
+        <p:txBody>
+          <a:bodyPr>
+            <a:normAutofit lnSpcReduction="10000"/>
+          </a:bodyPr>
           <a:lstStyle/>
           <a:p>
             <a:r>
               <a:rPr lang="en-US" dirty="0"/>
               <a:t>Md Shariful Islam</a:t>
+            </a:r>
+          </a:p>
+          <a:p>
+            <a:r>
+              <a:rPr lang="en-US" dirty="0"/>
+              <a:t>Teaching Assistant</a:t>
             </a:r>
           </a:p>
           <a:p>
@@ -3391,7 +3405,7 @@
               <a:rPr lang="en-US" i="1" dirty="0">
                 <a:hlinkClick r:id="rId2"/>
               </a:rPr>
-              <a:t>islam5@unbc.ca</a:t>
+              <a:t>Email: islam5@unbc.ca</a:t>
             </a:r>
             <a:endParaRPr lang="en-US" i="1" dirty="0"/>
           </a:p>
@@ -3400,7 +3414,7 @@
               <a:rPr lang="en-US" i="1" dirty="0">
                 <a:hlinkClick r:id="rId3"/>
               </a:rPr>
-              <a:t>https://github.com/neonbranch/CPSC-357-Lab</a:t>
+              <a:t>Lab: https://github.com/neonbranch/CPSC-357-Lab</a:t>
             </a:r>
             <a:endParaRPr lang="en-US" i="1" dirty="0"/>
           </a:p>
@@ -3514,7 +3528,18 @@
           <a:p>
             <a:r>
               <a:rPr lang="en-US" dirty="0"/>
-              <a:t>Understanding code structure &amp; Files</a:t>
+              <a:t>Understanding File Structure e.g. </a:t>
+            </a:r>
+            <a:r>
+              <a:rPr lang="en-US" dirty="0" err="1"/>
+              <a:t>app.json</a:t>
+            </a:r>
+            <a:endParaRPr lang="en-US" dirty="0"/>
+          </a:p>
+          <a:p>
+            <a:r>
+              <a:rPr lang="en-US" dirty="0"/>
+              <a:t>Prototype Development Idea</a:t>
             </a:r>
           </a:p>
           <a:p>
@@ -3560,7 +3585,7 @@
           <p:cNvPr id="2" name="Title 1">
             <a:extLst>
               <a:ext uri="{FF2B5EF4-FFF2-40B4-BE49-F238E27FC236}">
-                <a16:creationId xmlns:a16="http://schemas.microsoft.com/office/drawing/2014/main" id="{ADCFDF00-6749-F4A6-75D7-93D5827C3EA8}"/>
+                <a16:creationId xmlns:a16="http://schemas.microsoft.com/office/drawing/2014/main" id="{9317DCD0-0149-8D9F-9191-D1EAC31E2B85}"/>
               </a:ext>
             </a:extLst>
           </p:cNvPr>
@@ -3578,7 +3603,7 @@
           <a:p>
             <a:r>
               <a:rPr lang="en-US" dirty="0"/>
-              <a:t>Prototype Development Idea? (Lab 1)</a:t>
+              <a:t>Outlines (Lab 2)</a:t>
             </a:r>
           </a:p>
         </p:txBody>
@@ -3588,7 +3613,7 @@
           <p:cNvPr id="3" name="Content Placeholder 2">
             <a:extLst>
               <a:ext uri="{FF2B5EF4-FFF2-40B4-BE49-F238E27FC236}">
-                <a16:creationId xmlns:a16="http://schemas.microsoft.com/office/drawing/2014/main" id="{227A4961-C0FF-C042-EBFE-3FDAC164ED11}"/>
+                <a16:creationId xmlns:a16="http://schemas.microsoft.com/office/drawing/2014/main" id="{CB9AE959-25A7-68BB-1ABA-64129E373A3A}"/>
               </a:ext>
             </a:extLst>
           </p:cNvPr>
@@ -3606,33 +3631,71 @@
           <a:p>
             <a:r>
               <a:rPr lang="en-US" dirty="0"/>
-              <a:t>Instagram</a:t>
+              <a:t>React Native Architecture Overview</a:t>
             </a:r>
           </a:p>
           <a:p>
             <a:r>
               <a:rPr lang="en-US" dirty="0"/>
-              <a:t>Blog</a:t>
+              <a:t>React Native and Expo Version</a:t>
             </a:r>
           </a:p>
           <a:p>
             <a:r>
               <a:rPr lang="en-US" dirty="0"/>
-              <a:t>Portfolio</a:t>
-            </a:r>
-          </a:p>
-          <a:p>
+              <a:t>Styling Components</a:t>
+            </a:r>
+          </a:p>
+          <a:p>
+            <a:r>
+              <a:rPr lang="en-US" dirty="0" err="1"/>
+              <a:t>ScrollView</a:t>
+            </a:r>
             <a:r>
               <a:rPr lang="en-US" dirty="0"/>
-              <a:t>Etc.</a:t>
-            </a:r>
+              <a:t>,  </a:t>
+            </a:r>
+            <a:r>
+              <a:rPr lang="en-US" dirty="0" err="1"/>
+              <a:t>FlatList</a:t>
+            </a:r>
+            <a:r>
+              <a:rPr lang="en-US" dirty="0"/>
+              <a:t> / </a:t>
+            </a:r>
+            <a:r>
+              <a:rPr lang="en-US" dirty="0" err="1"/>
+              <a:t>ListView</a:t>
+            </a:r>
+            <a:endParaRPr lang="en-US" dirty="0"/>
+          </a:p>
+          <a:p>
+            <a:r>
+              <a:rPr lang="en-US" dirty="0"/>
+              <a:t>Layout with Flexbox</a:t>
+            </a:r>
+          </a:p>
+          <a:p>
+            <a:r>
+              <a:rPr lang="en-US" dirty="0"/>
+              <a:t>Splash Screen &amp; </a:t>
+            </a:r>
+            <a:r>
+              <a:rPr lang="en-US"/>
+              <a:t>Activity Indicato</a:t>
+            </a:r>
+            <a:r>
+              <a:rPr lang="en-US" dirty="0"/>
+              <a:t>r</a:t>
+            </a:r>
+            <a:endParaRPr lang="en-US"/>
           </a:p>
         </p:txBody>
       </p:sp>
     </p:spTree>
     <p:extLst>
       <p:ext uri="{BB962C8B-B14F-4D97-AF65-F5344CB8AC3E}">
-        <p14:creationId xmlns:p14="http://schemas.microsoft.com/office/powerpoint/2010/main" val="3095868584"/>
+        <p14:creationId xmlns:p14="http://schemas.microsoft.com/office/powerpoint/2010/main" val="467607932"/>
       </p:ext>
     </p:extLst>
   </p:cSld>
@@ -3664,7 +3727,7 @@
           <p:cNvPr id="2" name="Title 1">
             <a:extLst>
               <a:ext uri="{FF2B5EF4-FFF2-40B4-BE49-F238E27FC236}">
-                <a16:creationId xmlns:a16="http://schemas.microsoft.com/office/drawing/2014/main" id="{9317DCD0-0149-8D9F-9191-D1EAC31E2B85}"/>
+                <a16:creationId xmlns:a16="http://schemas.microsoft.com/office/drawing/2014/main" id="{A5119DB3-FDD3-B9E0-CD26-C8B6283E1F79}"/>
               </a:ext>
             </a:extLst>
           </p:cNvPr>
@@ -3682,7 +3745,7 @@
           <a:p>
             <a:r>
               <a:rPr lang="en-US" dirty="0"/>
-              <a:t>Outlines (Lab 2)</a:t>
+              <a:t>Outlines (Lab 3)</a:t>
             </a:r>
           </a:p>
         </p:txBody>
@@ -3692,7 +3755,7 @@
           <p:cNvPr id="3" name="Content Placeholder 2">
             <a:extLst>
               <a:ext uri="{FF2B5EF4-FFF2-40B4-BE49-F238E27FC236}">
-                <a16:creationId xmlns:a16="http://schemas.microsoft.com/office/drawing/2014/main" id="{CB9AE959-25A7-68BB-1ABA-64129E373A3A}"/>
+                <a16:creationId xmlns:a16="http://schemas.microsoft.com/office/drawing/2014/main" id="{81605B35-BEB4-9D87-B279-04C49F880698}"/>
               </a:ext>
             </a:extLst>
           </p:cNvPr>
@@ -3703,19 +3766,68 @@
             <p:ph idx="1"/>
           </p:nvPr>
         </p:nvSpPr>
-        <p:spPr/>
-        <p:txBody>
-          <a:bodyPr/>
-          <a:lstStyle/>
-          <a:p>
+        <p:spPr>
+          <a:xfrm>
+            <a:off x="838200" y="1612974"/>
+            <a:ext cx="10515600" cy="4351338"/>
+          </a:xfrm>
+        </p:spPr>
+        <p:txBody>
+          <a:bodyPr/>
+          <a:lstStyle/>
+          <a:p>
+            <a:r>
+              <a:rPr lang="en-US" dirty="0"/>
+              <a:t>Handling User input &amp; Form,</a:t>
+            </a:r>
+          </a:p>
+          <a:p>
+            <a:r>
+              <a:rPr lang="en-US" dirty="0"/>
+              <a:t>Props and States</a:t>
+            </a:r>
+          </a:p>
+          <a:p>
+            <a:r>
+              <a:rPr lang="en-US" dirty="0"/>
+              <a:t>React Hooks e.g., </a:t>
+            </a:r>
+            <a:r>
+              <a:rPr lang="en-US" dirty="0" err="1"/>
+              <a:t>useState</a:t>
+            </a:r>
             <a:endParaRPr lang="en-US" dirty="0"/>
+          </a:p>
+          <a:p>
+            <a:r>
+              <a:rPr lang="en-US" dirty="0"/>
+              <a:t>Handling Touches</a:t>
+            </a:r>
+          </a:p>
+          <a:p>
+            <a:r>
+              <a:rPr lang="en-US" dirty="0"/>
+              <a:t>Introduce navigation(Stack, tab, drawer) </a:t>
+            </a:r>
+          </a:p>
+          <a:p>
+            <a:r>
+              <a:rPr lang="en-US" dirty="0"/>
+              <a:t>Navigating Between Screens</a:t>
+            </a:r>
+          </a:p>
+          <a:p>
+            <a:r>
+              <a:rPr lang="en-US" dirty="0"/>
+              <a:t>Passing data using Navigations</a:t>
+            </a:r>
           </a:p>
         </p:txBody>
       </p:sp>
     </p:spTree>
     <p:extLst>
       <p:ext uri="{BB962C8B-B14F-4D97-AF65-F5344CB8AC3E}">
-        <p14:creationId xmlns:p14="http://schemas.microsoft.com/office/powerpoint/2010/main" val="467607932"/>
+        <p14:creationId xmlns:p14="http://schemas.microsoft.com/office/powerpoint/2010/main" val="4237503733"/>
       </p:ext>
     </p:extLst>
   </p:cSld>
@@ -3747,7 +3859,7 @@
           <p:cNvPr id="2" name="Title 1">
             <a:extLst>
               <a:ext uri="{FF2B5EF4-FFF2-40B4-BE49-F238E27FC236}">
-                <a16:creationId xmlns:a16="http://schemas.microsoft.com/office/drawing/2014/main" id="{A5119DB3-FDD3-B9E0-CD26-C8B6283E1F79}"/>
+                <a16:creationId xmlns:a16="http://schemas.microsoft.com/office/drawing/2014/main" id="{2CEE9B29-529F-2095-7631-6FB2F5F3CC28}"/>
               </a:ext>
             </a:extLst>
           </p:cNvPr>
@@ -3765,7 +3877,7 @@
           <a:p>
             <a:r>
               <a:rPr lang="en-US" dirty="0"/>
-              <a:t>Outlines (Lab 3)</a:t>
+              <a:t>Outlines (L4/W5)</a:t>
             </a:r>
           </a:p>
         </p:txBody>
@@ -3775,7 +3887,7 @@
           <p:cNvPr id="3" name="Content Placeholder 2">
             <a:extLst>
               <a:ext uri="{FF2B5EF4-FFF2-40B4-BE49-F238E27FC236}">
-                <a16:creationId xmlns:a16="http://schemas.microsoft.com/office/drawing/2014/main" id="{81605B35-BEB4-9D87-B279-04C49F880698}"/>
+                <a16:creationId xmlns:a16="http://schemas.microsoft.com/office/drawing/2014/main" id="{0A8FA704-ABF0-76B5-1828-73F762372DFB}"/>
               </a:ext>
             </a:extLst>
           </p:cNvPr>
@@ -3791,14 +3903,164 @@
           <a:bodyPr/>
           <a:lstStyle/>
           <a:p>
-            <a:endParaRPr lang="en-US"/>
+            <a:r>
+              <a:rPr lang="en-US" dirty="0"/>
+              <a:t>React Context and Redux</a:t>
+            </a:r>
+          </a:p>
+          <a:p>
+            <a:r>
+              <a:rPr lang="en-US" dirty="0"/>
+              <a:t>Auth Token Management</a:t>
+            </a:r>
+          </a:p>
+          <a:p>
+            <a:r>
+              <a:rPr lang="en-US" dirty="0"/>
+              <a:t>Shopping Cart Management</a:t>
+            </a:r>
+          </a:p>
+          <a:p>
+            <a:r>
+              <a:rPr lang="en-US" dirty="0"/>
+              <a:t>Platform-Specific Code</a:t>
+            </a:r>
+          </a:p>
+          <a:p>
+            <a:r>
+              <a:rPr lang="en-US" dirty="0"/>
+              <a:t>Getting Started with TypeScript</a:t>
+            </a:r>
+          </a:p>
+          <a:p>
+            <a:r>
+              <a:rPr lang="en-US" dirty="0"/>
+              <a:t>React Native </a:t>
+            </a:r>
+            <a:r>
+              <a:rPr lang="en-US" dirty="0" err="1"/>
+              <a:t>DevTools</a:t>
+            </a:r>
+            <a:endParaRPr lang="en-US" dirty="0"/>
           </a:p>
         </p:txBody>
       </p:sp>
     </p:spTree>
     <p:extLst>
       <p:ext uri="{BB962C8B-B14F-4D97-AF65-F5344CB8AC3E}">
-        <p14:creationId xmlns:p14="http://schemas.microsoft.com/office/powerpoint/2010/main" val="4237503733"/>
+        <p14:creationId xmlns:p14="http://schemas.microsoft.com/office/powerpoint/2010/main" val="1975491089"/>
+      </p:ext>
+    </p:extLst>
+  </p:cSld>
+  <p:clrMapOvr>
+    <a:masterClrMapping/>
+  </p:clrMapOvr>
+</p:sld>
+</file>
+
+<file path=ppt/slides/slide6.xml><?xml version="1.0" encoding="utf-8"?>
+<p:sld xmlns:a="http://schemas.openxmlformats.org/drawingml/2006/main" xmlns:r="http://schemas.openxmlformats.org/officeDocument/2006/relationships" xmlns:p="http://schemas.openxmlformats.org/presentationml/2006/main">
+  <p:cSld>
+    <p:spTree>
+      <p:nvGrpSpPr>
+        <p:cNvPr id="1" name=""/>
+        <p:cNvGrpSpPr/>
+        <p:nvPr/>
+      </p:nvGrpSpPr>
+      <p:grpSpPr>
+        <a:xfrm>
+          <a:off x="0" y="0"/>
+          <a:ext cx="0" cy="0"/>
+          <a:chOff x="0" y="0"/>
+          <a:chExt cx="0" cy="0"/>
+        </a:xfrm>
+      </p:grpSpPr>
+      <p:sp>
+        <p:nvSpPr>
+          <p:cNvPr id="2" name="Title 1">
+            <a:extLst>
+              <a:ext uri="{FF2B5EF4-FFF2-40B4-BE49-F238E27FC236}">
+                <a16:creationId xmlns:a16="http://schemas.microsoft.com/office/drawing/2014/main" id="{A381DDA4-7DAB-97CB-5D69-0AEC9E9CC61C}"/>
+              </a:ext>
+            </a:extLst>
+          </p:cNvPr>
+          <p:cNvSpPr>
+            <a:spLocks noGrp="1"/>
+          </p:cNvSpPr>
+          <p:nvPr>
+            <p:ph type="title"/>
+          </p:nvPr>
+        </p:nvSpPr>
+        <p:spPr/>
+        <p:txBody>
+          <a:bodyPr/>
+          <a:lstStyle/>
+          <a:p>
+            <a:r>
+              <a:rPr lang="en-US" dirty="0"/>
+              <a:t>Outline (L5/W6)</a:t>
+            </a:r>
+          </a:p>
+        </p:txBody>
+      </p:sp>
+      <p:sp>
+        <p:nvSpPr>
+          <p:cNvPr id="3" name="Content Placeholder 2">
+            <a:extLst>
+              <a:ext uri="{FF2B5EF4-FFF2-40B4-BE49-F238E27FC236}">
+                <a16:creationId xmlns:a16="http://schemas.microsoft.com/office/drawing/2014/main" id="{E95406D8-601D-CAF1-1F34-C96B54529B8F}"/>
+              </a:ext>
+            </a:extLst>
+          </p:cNvPr>
+          <p:cNvSpPr>
+            <a:spLocks noGrp="1"/>
+          </p:cNvSpPr>
+          <p:nvPr>
+            <p:ph idx="1"/>
+          </p:nvPr>
+        </p:nvSpPr>
+        <p:spPr/>
+        <p:txBody>
+          <a:bodyPr/>
+          <a:lstStyle/>
+          <a:p>
+            <a:r>
+              <a:rPr lang="en-US" dirty="0"/>
+              <a:t>Capturing Image using  </a:t>
+            </a:r>
+            <a:r>
+              <a:rPr lang="en-US" dirty="0" err="1"/>
+              <a:t>ExpoCamera</a:t>
+            </a:r>
+            <a:r>
+              <a:rPr lang="en-US" dirty="0"/>
+              <a:t>, </a:t>
+            </a:r>
+          </a:p>
+          <a:p>
+            <a:r>
+              <a:rPr lang="en-US" dirty="0"/>
+              <a:t>Accessing Media Library</a:t>
+            </a:r>
+          </a:p>
+          <a:p>
+            <a:r>
+              <a:rPr lang="en-US" dirty="0"/>
+              <a:t>Upload image using Image Picker APIs </a:t>
+            </a:r>
+          </a:p>
+          <a:p>
+            <a:r>
+              <a:rPr lang="en-US" dirty="0"/>
+              <a:t>Allowing permissions</a:t>
+            </a:r>
+          </a:p>
+        </p:txBody>
+      </p:sp>
+    </p:spTree>
+    <p:extLst>
+      <p:ext uri="{BB962C8B-B14F-4D97-AF65-F5344CB8AC3E}">
+        <p14:creationId xmlns:p14="http://schemas.microsoft.com/office/powerpoint/2010/main" val="1512424229"/>
       </p:ext>
     </p:extLst>
   </p:cSld>

--- a/common/CPSC357_Lectures.pptx
+++ b/common/CPSC357_Lectures.pptx
@@ -3678,17 +3678,8 @@
           <a:p>
             <a:r>
               <a:rPr lang="en-US" dirty="0"/>
-              <a:t>Splash Screen &amp; </a:t>
-            </a:r>
-            <a:r>
-              <a:rPr lang="en-US"/>
-              <a:t>Activity Indicato</a:t>
-            </a:r>
-            <a:r>
-              <a:rPr lang="en-US" dirty="0"/>
-              <a:t>r</a:t>
-            </a:r>
-            <a:endParaRPr lang="en-US"/>
+              <a:t>Splash Screen &amp; Activity Indicator</a:t>
+            </a:r>
           </a:p>
         </p:txBody>
       </p:sp>
